--- a/FPGA專題實習Two _counter.pptx
+++ b/FPGA專題實習Two _counter.pptx
@@ -262,7 +262,7 @@
           <a:p>
             <a:fld id="{8237F447-89E0-46E5-B126-5C5EA3D4E2F1}" type="datetimeFigureOut">
               <a:rPr lang="zh-TW" altLang="en-US" smtClean="0"/>
-              <a:t>2024/9/30</a:t>
+              <a:t>2025/1/8</a:t>
             </a:fld>
             <a:endParaRPr lang="zh-TW" altLang="en-US"/>
           </a:p>
@@ -460,7 +460,7 @@
           <a:p>
             <a:fld id="{8237F447-89E0-46E5-B126-5C5EA3D4E2F1}" type="datetimeFigureOut">
               <a:rPr lang="zh-TW" altLang="en-US" smtClean="0"/>
-              <a:t>2024/9/30</a:t>
+              <a:t>2025/1/8</a:t>
             </a:fld>
             <a:endParaRPr lang="zh-TW" altLang="en-US"/>
           </a:p>
@@ -668,7 +668,7 @@
           <a:p>
             <a:fld id="{8237F447-89E0-46E5-B126-5C5EA3D4E2F1}" type="datetimeFigureOut">
               <a:rPr lang="zh-TW" altLang="en-US" smtClean="0"/>
-              <a:t>2024/9/30</a:t>
+              <a:t>2025/1/8</a:t>
             </a:fld>
             <a:endParaRPr lang="zh-TW" altLang="en-US"/>
           </a:p>
@@ -866,7 +866,7 @@
           <a:p>
             <a:fld id="{8237F447-89E0-46E5-B126-5C5EA3D4E2F1}" type="datetimeFigureOut">
               <a:rPr lang="zh-TW" altLang="en-US" smtClean="0"/>
-              <a:t>2024/9/30</a:t>
+              <a:t>2025/1/8</a:t>
             </a:fld>
             <a:endParaRPr lang="zh-TW" altLang="en-US"/>
           </a:p>
@@ -1141,7 +1141,7 @@
           <a:p>
             <a:fld id="{8237F447-89E0-46E5-B126-5C5EA3D4E2F1}" type="datetimeFigureOut">
               <a:rPr lang="zh-TW" altLang="en-US" smtClean="0"/>
-              <a:t>2024/9/30</a:t>
+              <a:t>2025/1/8</a:t>
             </a:fld>
             <a:endParaRPr lang="zh-TW" altLang="en-US"/>
           </a:p>
@@ -1406,7 +1406,7 @@
           <a:p>
             <a:fld id="{8237F447-89E0-46E5-B126-5C5EA3D4E2F1}" type="datetimeFigureOut">
               <a:rPr lang="zh-TW" altLang="en-US" smtClean="0"/>
-              <a:t>2024/9/30</a:t>
+              <a:t>2025/1/8</a:t>
             </a:fld>
             <a:endParaRPr lang="zh-TW" altLang="en-US"/>
           </a:p>
@@ -1818,7 +1818,7 @@
           <a:p>
             <a:fld id="{8237F447-89E0-46E5-B126-5C5EA3D4E2F1}" type="datetimeFigureOut">
               <a:rPr lang="zh-TW" altLang="en-US" smtClean="0"/>
-              <a:t>2024/9/30</a:t>
+              <a:t>2025/1/8</a:t>
             </a:fld>
             <a:endParaRPr lang="zh-TW" altLang="en-US"/>
           </a:p>
@@ -1959,7 +1959,7 @@
           <a:p>
             <a:fld id="{8237F447-89E0-46E5-B126-5C5EA3D4E2F1}" type="datetimeFigureOut">
               <a:rPr lang="zh-TW" altLang="en-US" smtClean="0"/>
-              <a:t>2024/9/30</a:t>
+              <a:t>2025/1/8</a:t>
             </a:fld>
             <a:endParaRPr lang="zh-TW" altLang="en-US"/>
           </a:p>
@@ -2072,7 +2072,7 @@
           <a:p>
             <a:fld id="{8237F447-89E0-46E5-B126-5C5EA3D4E2F1}" type="datetimeFigureOut">
               <a:rPr lang="zh-TW" altLang="en-US" smtClean="0"/>
-              <a:t>2024/9/30</a:t>
+              <a:t>2025/1/8</a:t>
             </a:fld>
             <a:endParaRPr lang="zh-TW" altLang="en-US"/>
           </a:p>
@@ -2383,7 +2383,7 @@
           <a:p>
             <a:fld id="{8237F447-89E0-46E5-B126-5C5EA3D4E2F1}" type="datetimeFigureOut">
               <a:rPr lang="zh-TW" altLang="en-US" smtClean="0"/>
-              <a:t>2024/9/30</a:t>
+              <a:t>2025/1/8</a:t>
             </a:fld>
             <a:endParaRPr lang="zh-TW" altLang="en-US"/>
           </a:p>
@@ -2671,7 +2671,7 @@
           <a:p>
             <a:fld id="{8237F447-89E0-46E5-B126-5C5EA3D4E2F1}" type="datetimeFigureOut">
               <a:rPr lang="zh-TW" altLang="en-US" smtClean="0"/>
-              <a:t>2024/9/30</a:t>
+              <a:t>2025/1/8</a:t>
             </a:fld>
             <a:endParaRPr lang="zh-TW" altLang="en-US"/>
           </a:p>
@@ -2912,7 +2912,7 @@
           <a:p>
             <a:fld id="{8237F447-89E0-46E5-B126-5C5EA3D4E2F1}" type="datetimeFigureOut">
               <a:rPr lang="zh-TW" altLang="en-US" smtClean="0"/>
-              <a:t>2024/9/30</a:t>
+              <a:t>2025/1/8</a:t>
             </a:fld>
             <a:endParaRPr lang="zh-TW" altLang="en-US"/>
           </a:p>
@@ -3814,7 +3814,7 @@
         <p:spPr>
           <a:xfrm>
             <a:off x="409721" y="4713075"/>
-            <a:ext cx="706347" cy="369332"/>
+            <a:ext cx="619080" cy="369332"/>
           </a:xfrm>
           <a:prstGeom prst="rect">
             <a:avLst/>
@@ -3834,7 +3834,7 @@
           <a:p>
             <a:r>
               <a:rPr lang="en-US" altLang="zh-TW" dirty="0"/>
-              <a:t>State</a:t>
+              <a:t>FSM</a:t>
             </a:r>
             <a:endParaRPr lang="zh-TW" altLang="en-US" dirty="0"/>
           </a:p>
@@ -3850,6 +3850,7 @@
             </a:extLst>
           </p:cNvPr>
           <p:cNvCxnSpPr>
+            <a:cxnSpLocks/>
             <a:stCxn id="18" idx="3"/>
             <a:endCxn id="6" idx="1"/>
           </p:cNvCxnSpPr>
@@ -4106,8 +4107,8 @@
         </p:nvCxnSpPr>
         <p:spPr>
           <a:xfrm flipH="1">
-            <a:off x="1116068" y="1791631"/>
-            <a:ext cx="9216408" cy="3106110"/>
+            <a:off x="1028801" y="1791631"/>
+            <a:ext cx="9303675" cy="3106110"/>
           </a:xfrm>
           <a:prstGeom prst="straightConnector1">
             <a:avLst/>
@@ -4152,8 +4153,8 @@
         </p:nvCxnSpPr>
         <p:spPr>
           <a:xfrm flipH="1">
-            <a:off x="1116068" y="1791631"/>
-            <a:ext cx="4346532" cy="3106110"/>
+            <a:off x="1028801" y="1791631"/>
+            <a:ext cx="4433799" cy="3106110"/>
           </a:xfrm>
           <a:prstGeom prst="straightConnector1">
             <a:avLst/>
@@ -4181,6 +4182,47 @@
           </a:fontRef>
         </p:style>
       </p:cxnSp>
+      <p:sp>
+        <p:nvSpPr>
+          <p:cNvPr id="8" name="文字方塊 7">
+            <a:extLst>
+              <a:ext uri="{FF2B5EF4-FFF2-40B4-BE49-F238E27FC236}">
+                <a16:creationId xmlns:a16="http://schemas.microsoft.com/office/drawing/2014/main" id="{ED2BA594-F893-2FCF-0D30-7938A1FFEA28}"/>
+              </a:ext>
+            </a:extLst>
+          </p:cNvPr>
+          <p:cNvSpPr txBox="1"/>
+          <p:nvPr/>
+        </p:nvSpPr>
+        <p:spPr>
+          <a:xfrm>
+            <a:off x="4541999" y="2925745"/>
+            <a:ext cx="1113646" cy="369332"/>
+          </a:xfrm>
+          <a:prstGeom prst="rect">
+            <a:avLst/>
+          </a:prstGeom>
+          <a:noFill/>
+          <a:ln>
+            <a:solidFill>
+              <a:schemeClr val="tx1"/>
+            </a:solidFill>
+          </a:ln>
+        </p:spPr>
+        <p:txBody>
+          <a:bodyPr wrap="square" rtlCol="0">
+            <a:spAutoFit/>
+          </a:bodyPr>
+          <a:lstStyle/>
+          <a:p>
+            <a:r>
+              <a:rPr lang="en-US" altLang="zh-TW" dirty="0"/>
+              <a:t>FSM</a:t>
+            </a:r>
+            <a:endParaRPr lang="zh-TW" altLang="en-US" dirty="0"/>
+          </a:p>
+        </p:txBody>
+      </p:sp>
     </p:spTree>
     <p:extLst>
       <p:ext uri="{BB962C8B-B14F-4D97-AF65-F5344CB8AC3E}">
@@ -4344,8 +4386,8 @@
           <a:lstStyle/>
           <a:p>
             <a:r>
-              <a:rPr lang="en-US" altLang="zh-TW" dirty="0"/>
-              <a:t>State:</a:t>
+              <a:rPr lang="en-US" altLang="zh-TW"/>
+              <a:t>FSM:</a:t>
             </a:r>
             <a:r>
               <a:rPr lang="zh-TW" altLang="en-US" dirty="0"/>

--- a/FPGA專題實習Two _counter.pptx
+++ b/FPGA專題實習Two _counter.pptx
@@ -4182,47 +4182,6 @@
           </a:fontRef>
         </p:style>
       </p:cxnSp>
-      <p:sp>
-        <p:nvSpPr>
-          <p:cNvPr id="8" name="文字方塊 7">
-            <a:extLst>
-              <a:ext uri="{FF2B5EF4-FFF2-40B4-BE49-F238E27FC236}">
-                <a16:creationId xmlns:a16="http://schemas.microsoft.com/office/drawing/2014/main" id="{ED2BA594-F893-2FCF-0D30-7938A1FFEA28}"/>
-              </a:ext>
-            </a:extLst>
-          </p:cNvPr>
-          <p:cNvSpPr txBox="1"/>
-          <p:nvPr/>
-        </p:nvSpPr>
-        <p:spPr>
-          <a:xfrm>
-            <a:off x="4541999" y="2925745"/>
-            <a:ext cx="1113646" cy="369332"/>
-          </a:xfrm>
-          <a:prstGeom prst="rect">
-            <a:avLst/>
-          </a:prstGeom>
-          <a:noFill/>
-          <a:ln>
-            <a:solidFill>
-              <a:schemeClr val="tx1"/>
-            </a:solidFill>
-          </a:ln>
-        </p:spPr>
-        <p:txBody>
-          <a:bodyPr wrap="square" rtlCol="0">
-            <a:spAutoFit/>
-          </a:bodyPr>
-          <a:lstStyle/>
-          <a:p>
-            <a:r>
-              <a:rPr lang="en-US" altLang="zh-TW" dirty="0"/>
-              <a:t>FSM</a:t>
-            </a:r>
-            <a:endParaRPr lang="zh-TW" altLang="en-US" dirty="0"/>
-          </a:p>
-        </p:txBody>
-      </p:sp>
     </p:spTree>
     <p:extLst>
       <p:ext uri="{BB962C8B-B14F-4D97-AF65-F5344CB8AC3E}">
@@ -4386,7 +4345,7 @@
           <a:lstStyle/>
           <a:p>
             <a:r>
-              <a:rPr lang="en-US" altLang="zh-TW"/>
+              <a:rPr lang="en-US" altLang="zh-TW" dirty="0"/>
               <a:t>FSM:</a:t>
             </a:r>
             <a:r>
